--- a/docs/ci-architecture.pptx
+++ b/docs/ci-architecture.pptx
@@ -27001,7 +27001,7 @@
                           </a:solidFill>
                           <a:latin typeface="Arial"/>
                         </a:rPr>
-                        <a:t>partie Minecraft seulement (26.1-1.1.0)</a:t>
+                        <a:t>étiquette MC seulement : 26.1.x-1.1.0, jamais 26.x</a:t>
                       </a:r>
                     </a:p>
                   </a:txBody>
